--- a/downloads/DCT_V1_Ch08_Slides.pptx
+++ b/downloads/DCT_V1_Ch08_Slides.pptx
@@ -130,7 +130,7 @@
   <p:extLst>
     <p:ext uri="{521415D9-36F7-43E2-AB2F-B90AF26B5E84}">
       <p14:sectionLst xmlns:p14="http://schemas.microsoft.com/office/powerpoint/2010/main">
-        <p14:section name="Opening" id="{0145b422-5743-219d-85df-f1f42b919371}">
+        <p14:section name="Opening" id="{72847d97-2f88-39da-4aff-5f55d10d6730}">
           <p14:sldIdLst>
             <p14:sldId id="256"/>
             <p14:sldId id="257"/>
@@ -138,54 +138,54 @@
             <p14:sldId id="259"/>
           </p14:sldIdLst>
         </p14:section>
-        <p14:section name="8.1 Why Transformation Needs Probability" id="{f7a4e060-ac97-4295-8c0d-1f5f11cfc5ae}">
+        <p14:section name="8.1 Why Transformation Needs Probability" id="{b819d30f-9635-630c-4d28-73120f502d2c}">
           <p14:sldIdLst>
             <p14:sldId id="260"/>
           </p14:sldIdLst>
         </p14:section>
-        <p14:section name="8.2 Sources of Enterprise Uncertainty" id="{38bb8c82-8c5e-8d02-7b69-5c6a4957231c}">
+        <p14:section name="8.2 Sources of Enterprise Uncertainty" id="{24d22a8b-c07b-6b4f-3a3b-a439a0dfc857}">
           <p14:sldIdLst>
             <p14:sldId id="261"/>
           </p14:sldIdLst>
         </p14:section>
-        <p14:section name="8.3 Probability Foundations" id="{6a001cfc-64aa-720b-6177-e83c7010fb2b}">
+        <p14:section name="8.3 Probability Foundations" id="{f3ce0b0c-139a-a500-75e3-bfa9d0650d02}">
           <p14:sldIdLst>
             <p14:sldId id="262"/>
           </p14:sldIdLst>
         </p14:section>
-        <p14:section name="8.4 Stochastic Systems in Discrete Time" id="{6ff6cf75-14d0-9373-b643-186699dadbe8}">
+        <p14:section name="8.4 Stochastic Systems in Discrete Time" id="{1fbf9716-ef4c-6498-3d4b-3117231b9661}">
           <p14:sldIdLst>
             <p14:sldId id="263"/>
           </p14:sldIdLst>
         </p14:section>
-        <p14:section name="8.5 The Evolution of Distributions" id="{766fe09b-3c60-db0e-21a2-f312a0019b8f}">
+        <p14:section name="8.5 The Evolution of Distributions" id="{be7372d0-e65d-71d8-4a0d-a55fe9c40a82}">
           <p14:sldIdLst>
             <p14:sldId id="264"/>
           </p14:sldIdLst>
         </p14:section>
-        <p14:section name="8.6 Enterprise Diffusion" id="{131488e9-c565-2db6-b0a6-8e1e84ae9ee0}">
+        <p14:section name="8.6 Enterprise Diffusion" id="{8abf3034-9cce-67d1-93aa-0eec4976b432}">
           <p14:sldIdLst>
             <p14:sldId id="265"/>
             <p14:sldId id="266"/>
           </p14:sldIdLst>
         </p14:section>
-        <p14:section name="8.7 Jump Processes and Jump-Diffusion" id="{f5f4dee9-3e04-a641-5cbb-810d821d3a8f}">
+        <p14:section name="8.7 Jump Processes and Jump-Diffusion" id="{389c1f8a-70f2-3c09-28c5-af7babe128c6}">
           <p14:sldIdLst>
             <p14:sldId id="267"/>
             <p14:sldId id="268"/>
           </p14:sldIdLst>
         </p14:section>
-        <p14:section name="8.8 The Flaw of Averages" id="{16982f6c-4fb5-1f48-51e6-6112403d8e25}">
+        <p14:section name="8.8 The Flaw of Averages" id="{8a16911f-792a-6f41-f0f8-d8021a674554}">
           <p14:sldIdLst>
             <p14:sldId id="269"/>
           </p14:sldIdLst>
         </p14:section>
-        <p14:section name="8.9 Monte Carlo Simulation" id="{2c771657-a702-cbe1-363b-d91e2c0fca0f}">
+        <p14:section name="8.9 Monte Carlo Simulation" id="{40f3aaf0-8438-8a31-0eb0-1bf3af6d64a6}">
           <p14:sldIdLst>
             <p14:sldId id="270"/>
           </p14:sldIdLst>
         </p14:section>
-        <p14:section name="Worked Example 8.1" id="{bb0d8227-2ef5-cb12-97ba-691fea697a1b}">
+        <p14:section name="Worked Example 8.1" id="{c99dae3b-3b3a-329f-d666-4757200a9553}">
           <p14:sldIdLst>
             <p14:sldId id="271"/>
             <p14:sldId id="272"/>
@@ -194,12 +194,12 @@
             <p14:sldId id="275"/>
           </p14:sldIdLst>
         </p14:section>
-        <p14:section name="AXIOM Lab 1.8" id="{81be9fd6-1d66-c972-b6ff-a8fb4111cd03}">
+        <p14:section name="AXIOM Lab 1.8" id="{061de092-1c42-f150-b856-aba3cbdeb75f}">
           <p14:sldIdLst>
             <p14:sldId id="276"/>
           </p14:sldIdLst>
         </p14:section>
-        <p14:section name="Close" id="{bfdef80f-4ec2-8999-f088-159bd79edc2b}">
+        <p14:section name="Close" id="{823674d9-c4a9-1f43-f2d5-53a7570e1523}">
           <p14:sldIdLst>
             <p14:sldId id="277"/>
             <p14:sldId id="278"/>

--- a/downloads/DCT_V1_Ch08_Slides.pptx
+++ b/downloads/DCT_V1_Ch08_Slides.pptx
@@ -130,7 +130,7 @@
   <p:extLst>
     <p:ext uri="{521415D9-36F7-43E2-AB2F-B90AF26B5E84}">
       <p14:sectionLst xmlns:p14="http://schemas.microsoft.com/office/powerpoint/2010/main">
-        <p14:section name="Opening" id="{72847d97-2f88-39da-4aff-5f55d10d6730}">
+        <p14:section name="Opening" id="{567f3585-18c4-8559-62cb-1333a6e8e1ad}">
           <p14:sldIdLst>
             <p14:sldId id="256"/>
             <p14:sldId id="257"/>
@@ -138,54 +138,54 @@
             <p14:sldId id="259"/>
           </p14:sldIdLst>
         </p14:section>
-        <p14:section name="8.1 Why Transformation Needs Probability" id="{b819d30f-9635-630c-4d28-73120f502d2c}">
+        <p14:section name="8.1 Why Transformation Needs Probability" id="{0f990b32-4760-dc14-0a76-3cd857ce2716}">
           <p14:sldIdLst>
             <p14:sldId id="260"/>
           </p14:sldIdLst>
         </p14:section>
-        <p14:section name="8.2 Sources of Enterprise Uncertainty" id="{24d22a8b-c07b-6b4f-3a3b-a439a0dfc857}">
+        <p14:section name="8.2 Sources of Enterprise Uncertainty" id="{4224c8dd-c79f-1891-91d0-fd081c04096d}">
           <p14:sldIdLst>
             <p14:sldId id="261"/>
           </p14:sldIdLst>
         </p14:section>
-        <p14:section name="8.3 Probability Foundations" id="{f3ce0b0c-139a-a500-75e3-bfa9d0650d02}">
+        <p14:section name="8.3 Probability Foundations" id="{c9cd92be-787b-fd85-e9f9-28a5916570b3}">
           <p14:sldIdLst>
             <p14:sldId id="262"/>
           </p14:sldIdLst>
         </p14:section>
-        <p14:section name="8.4 Stochastic Systems in Discrete Time" id="{1fbf9716-ef4c-6498-3d4b-3117231b9661}">
+        <p14:section name="8.4 Stochastic Systems in Discrete Time" id="{b0973ed6-5c2b-a0d4-06e1-cbf0a6b533be}">
           <p14:sldIdLst>
             <p14:sldId id="263"/>
           </p14:sldIdLst>
         </p14:section>
-        <p14:section name="8.5 The Evolution of Distributions" id="{be7372d0-e65d-71d8-4a0d-a55fe9c40a82}">
+        <p14:section name="8.5 The Evolution of Distributions" id="{106d7bfe-2df1-3023-0ca0-cf65b84fb711}">
           <p14:sldIdLst>
             <p14:sldId id="264"/>
           </p14:sldIdLst>
         </p14:section>
-        <p14:section name="8.6 Enterprise Diffusion" id="{8abf3034-9cce-67d1-93aa-0eec4976b432}">
+        <p14:section name="8.6 Enterprise Diffusion" id="{432431fa-547d-e6ad-687b-c7e6ea6347be}">
           <p14:sldIdLst>
             <p14:sldId id="265"/>
             <p14:sldId id="266"/>
           </p14:sldIdLst>
         </p14:section>
-        <p14:section name="8.7 Jump Processes and Jump-Diffusion" id="{389c1f8a-70f2-3c09-28c5-af7babe128c6}">
+        <p14:section name="8.7 Jump Processes and Jump-Diffusion" id="{5d6efa27-f568-c313-58c6-6e2cc3126585}">
           <p14:sldIdLst>
             <p14:sldId id="267"/>
             <p14:sldId id="268"/>
           </p14:sldIdLst>
         </p14:section>
-        <p14:section name="8.8 The Flaw of Averages" id="{8a16911f-792a-6f41-f0f8-d8021a674554}">
+        <p14:section name="8.8 The Flaw of Averages" id="{b55cfe4f-b51e-3099-f4d0-1189f126170d}">
           <p14:sldIdLst>
             <p14:sldId id="269"/>
           </p14:sldIdLst>
         </p14:section>
-        <p14:section name="8.9 Monte Carlo Simulation" id="{40f3aaf0-8438-8a31-0eb0-1bf3af6d64a6}">
+        <p14:section name="8.9 Monte Carlo Simulation" id="{bc241acd-5b3f-247e-09af-06fc63b2a88b}">
           <p14:sldIdLst>
             <p14:sldId id="270"/>
           </p14:sldIdLst>
         </p14:section>
-        <p14:section name="Worked Example 8.1" id="{c99dae3b-3b3a-329f-d666-4757200a9553}">
+        <p14:section name="Worked Example 8.1" id="{3c654bb1-cc79-668f-47a4-61ef24bf3242}">
           <p14:sldIdLst>
             <p14:sldId id="271"/>
             <p14:sldId id="272"/>
@@ -194,12 +194,12 @@
             <p14:sldId id="275"/>
           </p14:sldIdLst>
         </p14:section>
-        <p14:section name="AXIOM Lab 1.8" id="{061de092-1c42-f150-b856-aba3cbdeb75f}">
+        <p14:section name="AXIOM Lab 1.8" id="{3feb778e-8325-0c93-c999-5b7d6a30e3ff}">
           <p14:sldIdLst>
             <p14:sldId id="276"/>
           </p14:sldIdLst>
         </p14:section>
-        <p14:section name="Close" id="{823674d9-c4a9-1f43-f2d5-53a7570e1523}">
+        <p14:section name="Close" id="{321f4fc0-1473-4865-db37-9d17678cdb7a}">
           <p14:sldIdLst>
             <p14:sldId id="277"/>
             <p14:sldId id="278"/>
